--- a/プロンプトの一例.pptx
+++ b/プロンプトの一例.pptx
@@ -5,7 +5,8 @@
     <p:sldMasterId id="2147483648" r:id="rId1"/>
   </p:sldMasterIdLst>
   <p:sldIdLst>
-    <p:sldId id="256" r:id="rId2"/>
+    <p:sldId id="257" r:id="rId2"/>
+    <p:sldId id="256" r:id="rId3"/>
   </p:sldIdLst>
   <p:sldSz cx="12192000" cy="6858000"/>
   <p:notesSz cx="6858000" cy="9144000"/>
@@ -104,6 +105,11 @@
       </a:defRPr>
     </a:lvl9pPr>
   </p:defaultTextStyle>
+  <p:extLst>
+    <p:ext uri="{EFAFB233-063F-42B5-8137-9DF3F51BA10A}">
+      <p15:sldGuideLst xmlns:p15="http://schemas.microsoft.com/office/powerpoint/2012/main"/>
+    </p:ext>
+  </p:extLst>
 </p:presentation>
 </file>
 
@@ -254,7 +260,7 @@
           <a:p>
             <a:fld id="{7D3A92B5-A22B-40B0-B68F-1EF48AB6424F}" type="datetimeFigureOut">
               <a:rPr kumimoji="1" lang="ja-JP" altLang="en-US" smtClean="0"/>
-              <a:t>2026/5/11</a:t>
+              <a:t>2026/9/2</a:t>
             </a:fld>
             <a:endParaRPr kumimoji="1" lang="ja-JP" altLang="en-US"/>
           </a:p>
@@ -484,7 +490,7 @@
           <a:p>
             <a:fld id="{7D3A92B5-A22B-40B0-B68F-1EF48AB6424F}" type="datetimeFigureOut">
               <a:rPr kumimoji="1" lang="ja-JP" altLang="en-US" smtClean="0"/>
-              <a:t>2026/5/11</a:t>
+              <a:t>2026/9/2</a:t>
             </a:fld>
             <a:endParaRPr kumimoji="1" lang="ja-JP" altLang="en-US"/>
           </a:p>
@@ -724,7 +730,7 @@
           <a:p>
             <a:fld id="{7D3A92B5-A22B-40B0-B68F-1EF48AB6424F}" type="datetimeFigureOut">
               <a:rPr kumimoji="1" lang="ja-JP" altLang="en-US" smtClean="0"/>
-              <a:t>2026/5/11</a:t>
+              <a:t>2026/9/2</a:t>
             </a:fld>
             <a:endParaRPr kumimoji="1" lang="ja-JP" altLang="en-US"/>
           </a:p>
@@ -954,7 +960,7 @@
           <a:p>
             <a:fld id="{7D3A92B5-A22B-40B0-B68F-1EF48AB6424F}" type="datetimeFigureOut">
               <a:rPr kumimoji="1" lang="ja-JP" altLang="en-US" smtClean="0"/>
-              <a:t>2026/5/11</a:t>
+              <a:t>2026/9/2</a:t>
             </a:fld>
             <a:endParaRPr kumimoji="1" lang="ja-JP" altLang="en-US"/>
           </a:p>
@@ -1229,7 +1235,7 @@
           <a:p>
             <a:fld id="{7D3A92B5-A22B-40B0-B68F-1EF48AB6424F}" type="datetimeFigureOut">
               <a:rPr kumimoji="1" lang="ja-JP" altLang="en-US" smtClean="0"/>
-              <a:t>2026/5/11</a:t>
+              <a:t>2026/9/2</a:t>
             </a:fld>
             <a:endParaRPr kumimoji="1" lang="ja-JP" altLang="en-US"/>
           </a:p>
@@ -1558,7 +1564,7 @@
           <a:p>
             <a:fld id="{7D3A92B5-A22B-40B0-B68F-1EF48AB6424F}" type="datetimeFigureOut">
               <a:rPr kumimoji="1" lang="ja-JP" altLang="en-US" smtClean="0"/>
-              <a:t>2026/5/11</a:t>
+              <a:t>2026/9/2</a:t>
             </a:fld>
             <a:endParaRPr kumimoji="1" lang="ja-JP" altLang="en-US"/>
           </a:p>
@@ -2034,7 +2040,7 @@
           <a:p>
             <a:fld id="{7D3A92B5-A22B-40B0-B68F-1EF48AB6424F}" type="datetimeFigureOut">
               <a:rPr kumimoji="1" lang="ja-JP" altLang="en-US" smtClean="0"/>
-              <a:t>2026/5/11</a:t>
+              <a:t>2026/9/2</a:t>
             </a:fld>
             <a:endParaRPr kumimoji="1" lang="ja-JP" altLang="en-US"/>
           </a:p>
@@ -2175,7 +2181,7 @@
           <a:p>
             <a:fld id="{7D3A92B5-A22B-40B0-B68F-1EF48AB6424F}" type="datetimeFigureOut">
               <a:rPr kumimoji="1" lang="ja-JP" altLang="en-US" smtClean="0"/>
-              <a:t>2026/5/11</a:t>
+              <a:t>2026/9/2</a:t>
             </a:fld>
             <a:endParaRPr kumimoji="1" lang="ja-JP" altLang="en-US"/>
           </a:p>
@@ -2288,7 +2294,7 @@
           <a:p>
             <a:fld id="{7D3A92B5-A22B-40B0-B68F-1EF48AB6424F}" type="datetimeFigureOut">
               <a:rPr kumimoji="1" lang="ja-JP" altLang="en-US" smtClean="0"/>
-              <a:t>2026/5/11</a:t>
+              <a:t>2026/9/2</a:t>
             </a:fld>
             <a:endParaRPr kumimoji="1" lang="ja-JP" altLang="en-US"/>
           </a:p>
@@ -2631,7 +2637,7 @@
           <a:p>
             <a:fld id="{7D3A92B5-A22B-40B0-B68F-1EF48AB6424F}" type="datetimeFigureOut">
               <a:rPr kumimoji="1" lang="ja-JP" altLang="en-US" smtClean="0"/>
-              <a:t>2026/5/11</a:t>
+              <a:t>2026/9/2</a:t>
             </a:fld>
             <a:endParaRPr kumimoji="1" lang="ja-JP" altLang="en-US"/>
           </a:p>
@@ -2919,7 +2925,7 @@
           <a:p>
             <a:fld id="{7D3A92B5-A22B-40B0-B68F-1EF48AB6424F}" type="datetimeFigureOut">
               <a:rPr kumimoji="1" lang="ja-JP" altLang="en-US" smtClean="0"/>
-              <a:t>2026/5/11</a:t>
+              <a:t>2026/9/2</a:t>
             </a:fld>
             <a:endParaRPr kumimoji="1" lang="ja-JP" altLang="en-US"/>
           </a:p>
@@ -3192,7 +3198,7 @@
           <a:p>
             <a:fld id="{7D3A92B5-A22B-40B0-B68F-1EF48AB6424F}" type="datetimeFigureOut">
               <a:rPr kumimoji="1" lang="ja-JP" altLang="en-US" smtClean="0"/>
-              <a:t>2026/5/11</a:t>
+              <a:t>2026/9/2</a:t>
             </a:fld>
             <a:endParaRPr kumimoji="1" lang="ja-JP" altLang="en-US"/>
           </a:p>
@@ -3614,6 +3620,191 @@
           <p:cNvPr id="3" name="図 2">
             <a:extLst>
               <a:ext uri="{FF2B5EF4-FFF2-40B4-BE49-F238E27FC236}">
+                <a16:creationId xmlns:a16="http://schemas.microsoft.com/office/drawing/2014/main" id="{79483D7F-7BE5-42F8-A4BB-C01FB54E3D35}"/>
+              </a:ext>
+            </a:extLst>
+          </p:cNvPr>
+          <p:cNvPicPr>
+            <a:picLocks noChangeAspect="1"/>
+          </p:cNvPicPr>
+          <p:nvPr/>
+        </p:nvPicPr>
+        <p:blipFill rotWithShape="1">
+          <a:blip r:embed="rId2"/>
+          <a:srcRect b="28812"/>
+          <a:stretch/>
+        </p:blipFill>
+        <p:spPr>
+          <a:xfrm>
+            <a:off x="183855" y="2331630"/>
+            <a:ext cx="5183683" cy="4349332"/>
+          </a:xfrm>
+          <a:prstGeom prst="rect">
+            <a:avLst/>
+          </a:prstGeom>
+        </p:spPr>
+      </p:pic>
+      <p:pic>
+        <p:nvPicPr>
+          <p:cNvPr id="5" name="図 4">
+            <a:extLst>
+              <a:ext uri="{FF2B5EF4-FFF2-40B4-BE49-F238E27FC236}">
+                <a16:creationId xmlns:a16="http://schemas.microsoft.com/office/drawing/2014/main" id="{9203B5AC-F9D4-4B6E-8014-82C2325D28E8}"/>
+              </a:ext>
+            </a:extLst>
+          </p:cNvPr>
+          <p:cNvPicPr>
+            <a:picLocks noChangeAspect="1"/>
+          </p:cNvPicPr>
+          <p:nvPr/>
+        </p:nvPicPr>
+        <p:blipFill>
+          <a:blip r:embed="rId3"/>
+          <a:stretch>
+            <a:fillRect/>
+          </a:stretch>
+        </p:blipFill>
+        <p:spPr>
+          <a:xfrm>
+            <a:off x="6249769" y="105428"/>
+            <a:ext cx="5515745" cy="6134956"/>
+          </a:xfrm>
+          <a:prstGeom prst="rect">
+            <a:avLst/>
+          </a:prstGeom>
+        </p:spPr>
+      </p:pic>
+      <p:pic>
+        <p:nvPicPr>
+          <p:cNvPr id="6" name="図 5">
+            <a:extLst>
+              <a:ext uri="{FF2B5EF4-FFF2-40B4-BE49-F238E27FC236}">
+                <a16:creationId xmlns:a16="http://schemas.microsoft.com/office/drawing/2014/main" id="{A1C5F9D9-E0BA-4788-897F-CAF4F3DCEC25}"/>
+              </a:ext>
+            </a:extLst>
+          </p:cNvPr>
+          <p:cNvPicPr>
+            <a:picLocks noChangeAspect="1"/>
+          </p:cNvPicPr>
+          <p:nvPr/>
+        </p:nvPicPr>
+        <p:blipFill>
+          <a:blip r:embed="rId4"/>
+          <a:stretch>
+            <a:fillRect/>
+          </a:stretch>
+        </p:blipFill>
+        <p:spPr>
+          <a:xfrm>
+            <a:off x="183855" y="105428"/>
+            <a:ext cx="4909514" cy="2309843"/>
+          </a:xfrm>
+          <a:prstGeom prst="rect">
+            <a:avLst/>
+          </a:prstGeom>
+        </p:spPr>
+      </p:pic>
+      <p:pic>
+        <p:nvPicPr>
+          <p:cNvPr id="7" name="図 6">
+            <a:extLst>
+              <a:ext uri="{FF2B5EF4-FFF2-40B4-BE49-F238E27FC236}">
+                <a16:creationId xmlns:a16="http://schemas.microsoft.com/office/drawing/2014/main" id="{F6313382-AC51-48CD-99F4-7E0B66344A6C}"/>
+              </a:ext>
+            </a:extLst>
+          </p:cNvPr>
+          <p:cNvPicPr>
+            <a:picLocks noChangeAspect="1"/>
+          </p:cNvPicPr>
+          <p:nvPr/>
+        </p:nvPicPr>
+        <p:blipFill>
+          <a:blip r:embed="rId5"/>
+          <a:stretch>
+            <a:fillRect/>
+          </a:stretch>
+        </p:blipFill>
+        <p:spPr>
+          <a:xfrm>
+            <a:off x="6249768" y="6240384"/>
+            <a:ext cx="5515745" cy="552957"/>
+          </a:xfrm>
+          <a:prstGeom prst="rect">
+            <a:avLst/>
+          </a:prstGeom>
+        </p:spPr>
+      </p:pic>
+      <p:sp>
+        <p:nvSpPr>
+          <p:cNvPr id="2" name="テキスト ボックス 1">
+            <a:extLst>
+              <a:ext uri="{FF2B5EF4-FFF2-40B4-BE49-F238E27FC236}">
+                <a16:creationId xmlns:a16="http://schemas.microsoft.com/office/drawing/2014/main" id="{475443C3-F954-4DE4-9232-CB0F77602434}"/>
+              </a:ext>
+            </a:extLst>
+          </p:cNvPr>
+          <p:cNvSpPr txBox="1"/>
+          <p:nvPr/>
+        </p:nvSpPr>
+        <p:spPr>
+          <a:xfrm>
+            <a:off x="8446168" y="-2294"/>
+            <a:ext cx="3839513" cy="215444"/>
+          </a:xfrm>
+          <a:prstGeom prst="rect">
+            <a:avLst/>
+          </a:prstGeom>
+          <a:noFill/>
+        </p:spPr>
+        <p:txBody>
+          <a:bodyPr wrap="none" rtlCol="0">
+            <a:spAutoFit/>
+          </a:bodyPr>
+          <a:lstStyle/>
+          <a:p>
+            <a:r>
+              <a:rPr lang="en-US" altLang="ja-JP" sz="800" dirty="0"/>
+              <a:t>https://keirin6hen.github.io/sys-shikoryoku-daisu01/kangaekata.html?id=51</a:t>
+            </a:r>
+            <a:endParaRPr kumimoji="1" lang="ja-JP" altLang="en-US" sz="800" dirty="0"/>
+          </a:p>
+        </p:txBody>
+      </p:sp>
+    </p:spTree>
+    <p:extLst>
+      <p:ext uri="{BB962C8B-B14F-4D97-AF65-F5344CB8AC3E}">
+        <p14:creationId xmlns:p14="http://schemas.microsoft.com/office/powerpoint/2010/main" val="1772469813"/>
+      </p:ext>
+    </p:extLst>
+  </p:cSld>
+  <p:clrMapOvr>
+    <a:masterClrMapping/>
+  </p:clrMapOvr>
+</p:sld>
+</file>
+
+<file path=ppt/slides/slide2.xml><?xml version="1.0" encoding="utf-8"?>
+<p:sld xmlns:a="http://schemas.openxmlformats.org/drawingml/2006/main" xmlns:r="http://schemas.openxmlformats.org/officeDocument/2006/relationships" xmlns:p="http://schemas.openxmlformats.org/presentationml/2006/main">
+  <p:cSld>
+    <p:spTree>
+      <p:nvGrpSpPr>
+        <p:cNvPr id="1" name=""/>
+        <p:cNvGrpSpPr/>
+        <p:nvPr/>
+      </p:nvGrpSpPr>
+      <p:grpSpPr>
+        <a:xfrm>
+          <a:off x="0" y="0"/>
+          <a:ext cx="0" cy="0"/>
+          <a:chOff x="0" y="0"/>
+          <a:chExt cx="0" cy="0"/>
+        </a:xfrm>
+      </p:grpSpPr>
+      <p:pic>
+        <p:nvPicPr>
+          <p:cNvPr id="3" name="図 2">
+            <a:extLst>
+              <a:ext uri="{FF2B5EF4-FFF2-40B4-BE49-F238E27FC236}">
                 <a16:creationId xmlns:a16="http://schemas.microsoft.com/office/drawing/2014/main" id="{C835692F-4DE8-4297-9B61-B10B0C50F132}"/>
               </a:ext>
             </a:extLst>
